--- a/ios/Verification/office-layout/OfficeSamplePhoto.pptx
+++ b/ios/Verification/office-layout/OfficeSamplePhoto.pptx
@@ -372,7 +372,7 @@
                     <a:p>
                       <a:pPr algn="l"/>
                       <a:r>
-                        <a:rPr lang="en-US" sz="1200" dirty="0">
+                        <a:rPr lang="en-US" sz="1200" b="1" dirty="0">
                           <a:solidFill>
                             <a:srgbClr val="000000"/>
                           </a:solidFill>
@@ -415,7 +415,7 @@
                           <a:ea typeface="Malgun Gothic"/>
                           <a:cs typeface="Arial"/>
                         </a:rPr>
-                        <a:t>476 - 479</a:t>
+                        <a:t>476-479</a:t>
                       </a:r>
                     </a:p>
                   </a:txBody>
@@ -546,7 +546,18 @@
                           <a:ea typeface="Malgun Gothic"/>
                           <a:cs typeface="Arial"/>
                         </a:rPr>
-                        <a:t>518 - 689</a:t>
+                        <a:t>518 -</a:t>
+                      </a:r>
+                      <a:r>
+                        <a:rPr lang="en-US" sz="1200" b="1" dirty="0">
+                          <a:solidFill>
+                            <a:srgbClr val="000000"/>
+                          </a:solidFill>
+                          <a:latin typeface="Arial"/>
+                          <a:ea typeface="Malgun Gothic"/>
+                          <a:cs typeface="Arial"/>
+                        </a:rPr>
+                        <a:t> 689</a:t>
                       </a:r>
                     </a:p>
                   </a:txBody>
@@ -688,7 +699,7 @@
                           <a:ea typeface="Malgun Gothic"/>
                           <a:cs typeface="Arial"/>
                         </a:rPr>
-                        <a:t>644 - 769</a:t>
+                        <a:t>644-769</a:t>
                       </a:r>
                     </a:p>
                   </a:txBody>
@@ -830,7 +841,7 @@
                           <a:ea typeface="Malgun Gothic"/>
                           <a:cs typeface="Arial"/>
                         </a:rPr>
-                        <a:t>801 - 989</a:t>
+                        <a:t>801-989</a:t>
                       </a:r>
                     </a:p>
                   </a:txBody>
@@ -972,7 +983,7 @@
                           <a:ea typeface="Malgun Gothic"/>
                           <a:cs typeface="Arial"/>
                         </a:rPr>
-                        <a:t>834 - 1,062</a:t>
+                        <a:t>834-1,062</a:t>
                       </a:r>
                     </a:p>
                   </a:txBody>
@@ -1256,7 +1267,7 @@
                           <a:ea typeface="Malgun Gothic"/>
                           <a:cs typeface="Arial"/>
                         </a:rPr>
-                        <a:t>1,338 - 1,553</a:t>
+                        <a:t>1,338-1,553</a:t>
                       </a:r>
                     </a:p>
                   </a:txBody>
@@ -1471,7 +1482,7 @@
               <a:buNone/>
             </a:pPr>
             <a:r>
-              <a:rPr lang="en-US" sz="1000" dirty="0">
+              <a:rPr lang="en-US" sz="1000" b="1" spc="-27" dirty="0">
                 <a:solidFill>
                   <a:srgbClr val="000000"/>
                 </a:solidFill>
@@ -1984,7 +1995,7 @@
               </a:lnSpc>
             </a:pPr>
             <a:r>
-              <a:rPr lang="en-US" sz="1400" dirty="0">
+              <a:rPr lang="en-US" sz="1400" b="1" dirty="0">
                 <a:solidFill>
                   <a:srgbClr val="000000"/>
                 </a:solidFill>

--- a/ios/Verification/office-layout/OfficeSamplePhoto.pptx
+++ b/ios/Verification/office-layout/OfficeSamplePhoto.pptx
@@ -1356,7 +1356,7 @@
               <a:buNone/>
             </a:pPr>
             <a:r>
-              <a:rPr lang="en-US" sz="2750" spc="155" dirty="0">
+              <a:rPr lang="en-US" sz="2173" spc="155" dirty="0">
                 <a:solidFill>
                   <a:srgbClr val="000000"/>
                 </a:solidFill>

--- a/ios/Verification/office-layout/OfficeSamplePhoto.pptx
+++ b/ios/Verification/office-layout/OfficeSamplePhoto.pptx
@@ -110,7 +110,7 @@
         <p:spPr>
           <a:xfrm>
             <a:off x="417310" y="268271"/>
-            <a:ext cx="491830" cy="59616"/>
+            <a:ext cx="476926" cy="59616"/>
           </a:xfrm>
           <a:prstGeom prst="rect">
             <a:avLst/>
@@ -141,41 +141,17 @@
           </a:prstGeom>
         </p:spPr>
       </p:pic>
-      <p:pic>
-        <p:nvPicPr>
-          <p:cNvPr id="4" name="Picture 4"/>
-          <p:cNvPicPr>
-            <a:picLocks noChangeAspect="1"/>
-          </p:cNvPicPr>
-          <p:nvPr/>
-        </p:nvPicPr>
-        <p:blipFill>
-          <a:blip r:embed="rId4"/>
-          <a:stretch>
-            <a:fillRect/>
-          </a:stretch>
-        </p:blipFill>
-        <p:spPr>
-          <a:xfrm>
-            <a:off x="1550009" y="1386066"/>
-            <a:ext cx="789908" cy="44712"/>
-          </a:xfrm>
-          <a:prstGeom prst="rect">
-            <a:avLst/>
-          </a:prstGeom>
-        </p:spPr>
-      </p:pic>
       <p:graphicFrame>
         <p:nvGraphicFramePr>
-          <p:cNvPr id="5" name="Table 5"/>
+          <p:cNvPr id="4" name="Table 4"/>
           <p:cNvGraphicFramePr>
             <a:graphicFrameLocks noGrp="1"/>
           </p:cNvGraphicFramePr>
           <p:nvPr/>
         </p:nvGraphicFramePr>
         <p:xfrm>
-          <a:off x="1054453" y="3062953"/>
-          <a:ext cx="5588975" cy="2376861"/>
+          <a:off x="1054453" y="3069066"/>
+          <a:ext cx="5588975" cy="2370748"/>
         </p:xfrm>
         <a:graphic>
           <a:graphicData uri="http://schemas.openxmlformats.org/drawingml/2006/table">
@@ -183,11 +159,11 @@
               <a:tblPr/>
               <a:tblGrid>
                 <a:gridCol w="1754938"/>
-                <a:gridCol w="1121521"/>
-                <a:gridCol w="1382340"/>
+                <a:gridCol w="1119658"/>
+                <a:gridCol w="1384203"/>
                 <a:gridCol w="1330176"/>
               </a:tblGrid>
-              <a:tr h="320702">
+              <a:tr h="314589">
                 <a:tc>
                   <a:txBody>
                     <a:bodyPr/>
@@ -471,7 +447,7 @@
                   </a:tcPr>
                 </a:tc>
               </a:tr>
-              <a:tr h="277491">
+              <a:tr h="277214">
                 <a:tc>
                   <a:txBody>
                     <a:bodyPr/>
@@ -613,7 +589,7 @@
                   </a:tcPr>
                 </a:tc>
               </a:tr>
-              <a:tr h="279015">
+              <a:tr h="279685">
                 <a:tc>
                   <a:txBody>
                     <a:bodyPr/>
@@ -755,7 +731,7 @@
                   </a:tcPr>
                 </a:tc>
               </a:tr>
-              <a:tr h="294169">
+              <a:tr h="293988">
                 <a:tc>
                   <a:txBody>
                     <a:bodyPr/>
@@ -897,7 +873,7 @@
                   </a:tcPr>
                 </a:tc>
               </a:tr>
-              <a:tr h="311152">
+              <a:tr h="310940">
                 <a:tc>
                   <a:txBody>
                     <a:bodyPr/>
@@ -1329,14 +1305,14 @@
       </p:graphicFrame>
       <p:sp>
         <p:nvSpPr>
-          <p:cNvPr id="6" name="Text 6"/>
+          <p:cNvPr id="5" name="Text 5"/>
           <p:cNvSpPr txBox="1"/>
           <p:nvPr/>
         </p:nvSpPr>
         <p:spPr>
           <a:xfrm>
-            <a:off x="1058179" y="755523"/>
-            <a:ext cx="1821074" cy="419100"/>
+            <a:off x="1032097" y="755523"/>
+            <a:ext cx="1853676" cy="419100"/>
           </a:xfrm>
           <a:prstGeom prst="rect">
             <a:avLst/>
@@ -1356,7 +1332,7 @@
               <a:buNone/>
             </a:pPr>
             <a:r>
-              <a:rPr lang="en-US" sz="2173" spc="155" dirty="0">
+              <a:rPr lang="en-US" sz="2174" spc="196" dirty="0">
                 <a:solidFill>
                   <a:srgbClr val="000000"/>
                 </a:solidFill>
@@ -1371,14 +1347,14 @@
       </p:sp>
       <p:sp>
         <p:nvSpPr>
-          <p:cNvPr id="7" name="Text 7"/>
+          <p:cNvPr id="6" name="Text 6"/>
           <p:cNvSpPr txBox="1"/>
           <p:nvPr/>
         </p:nvSpPr>
         <p:spPr>
           <a:xfrm>
-            <a:off x="1140151" y="1160190"/>
-            <a:ext cx="1984086" cy="137160"/>
+            <a:off x="1143877" y="1171620"/>
+            <a:ext cx="1974771" cy="114300"/>
           </a:xfrm>
           <a:prstGeom prst="rect">
             <a:avLst/>
@@ -1393,12 +1369,12 @@
           <a:p>
             <a:pPr algn="l">
               <a:lnSpc>
-                <a:spcPts val="1080"/>
+                <a:spcPts val="900"/>
               </a:lnSpc>
               <a:buNone/>
             </a:pPr>
             <a:r>
-              <a:rPr lang="en-US" sz="900" spc="100" dirty="0">
+              <a:rPr lang="en-US" sz="750" spc="196" dirty="0">
                 <a:solidFill>
                   <a:srgbClr val="000000"/>
                 </a:solidFill>
@@ -1413,14 +1389,14 @@
       </p:sp>
       <p:sp>
         <p:nvSpPr>
-          <p:cNvPr id="8" name="Text 8"/>
+          <p:cNvPr id="7" name="Text 7"/>
           <p:cNvSpPr txBox="1"/>
           <p:nvPr/>
         </p:nvSpPr>
         <p:spPr>
           <a:xfrm>
-            <a:off x="2521559" y="2148658"/>
-            <a:ext cx="2841062" cy="220980"/>
+            <a:off x="2522025" y="2148658"/>
+            <a:ext cx="2836404" cy="220980"/>
           </a:xfrm>
           <a:prstGeom prst="rect">
             <a:avLst/>
@@ -1440,7 +1416,7 @@
               <a:buNone/>
             </a:pPr>
             <a:r>
-              <a:rPr lang="en-US" sz="1450" b="1" spc="-31" dirty="0">
+              <a:rPr lang="en-US" sz="1450" b="1" spc="-32" dirty="0">
                 <a:solidFill>
                   <a:srgbClr val="000000"/>
                 </a:solidFill>
@@ -1455,7 +1431,7 @@
       </p:sp>
       <p:sp>
         <p:nvSpPr>
-          <p:cNvPr id="9" name="Text 9"/>
+          <p:cNvPr id="8" name="Text 8"/>
           <p:cNvSpPr txBox="1"/>
           <p:nvPr/>
         </p:nvSpPr>
@@ -1490,14 +1466,25 @@
                 <a:ea typeface="Malgun Gothic"/>
                 <a:cs typeface="Arial"/>
               </a:rPr>
-              <a:t>October 2021</a:t>
+              <a:t>October</a:t>
+            </a:r>
+            <a:r>
+              <a:rPr lang="en-US" sz="1000" spc="-27" dirty="0">
+                <a:solidFill>
+                  <a:srgbClr val="000000"/>
+                </a:solidFill>
+                <a:latin typeface="Arial"/>
+                <a:ea typeface="Malgun Gothic"/>
+                <a:cs typeface="Arial"/>
+              </a:rPr>
+              <a:t> 2021</a:t>
             </a:r>
           </a:p>
         </p:txBody>
       </p:sp>
       <p:sp>
         <p:nvSpPr>
-          <p:cNvPr id="10" name="Text 10"/>
+          <p:cNvPr id="9" name="Text 9"/>
           <p:cNvSpPr txBox="1"/>
           <p:nvPr/>
         </p:nvSpPr>
@@ -1539,7 +1526,7 @@
       </p:sp>
       <p:sp>
         <p:nvSpPr>
-          <p:cNvPr id="11" name="Text 11"/>
+          <p:cNvPr id="10" name="Text 10"/>
           <p:cNvSpPr txBox="1"/>
           <p:nvPr/>
         </p:nvSpPr>
@@ -1582,7 +1569,7 @@
       </p:sp>
       <p:sp>
         <p:nvSpPr>
-          <p:cNvPr id="12" name="Text 12"/>
+          <p:cNvPr id="11" name="Text 11"/>
           <p:cNvSpPr txBox="1"/>
           <p:nvPr/>
         </p:nvSpPr>
@@ -1625,14 +1612,14 @@
       </p:sp>
       <p:sp>
         <p:nvSpPr>
-          <p:cNvPr id="13" name="Text 13"/>
+          <p:cNvPr id="12" name="Text 12"/>
           <p:cNvSpPr txBox="1"/>
           <p:nvPr/>
         </p:nvSpPr>
         <p:spPr>
           <a:xfrm>
-            <a:off x="1292916" y="6529687"/>
-            <a:ext cx="1383271" cy="144780"/>
+            <a:off x="1241831" y="6529687"/>
+            <a:ext cx="1447128" cy="144780"/>
           </a:xfrm>
           <a:prstGeom prst="rect">
             <a:avLst/>
@@ -1645,7 +1632,7 @@
           </a:bodyPr>
           <a:lstStyle/>
           <a:p>
-            <a:pPr algn="l" marL="216107" indent="-216107">
+            <a:pPr algn="l" marL="267192" indent="-267192">
               <a:lnSpc>
                 <a:spcPts val="1140"/>
               </a:lnSpc>
@@ -1668,7 +1655,7 @@
       </p:sp>
       <p:sp>
         <p:nvSpPr>
-          <p:cNvPr id="14" name="Text 14"/>
+          <p:cNvPr id="13" name="Text 13"/>
           <p:cNvSpPr txBox="1"/>
           <p:nvPr/>
         </p:nvSpPr>
@@ -1711,13 +1698,13 @@
       </p:sp>
       <p:sp>
         <p:nvSpPr>
-          <p:cNvPr id="15" name="Text 15"/>
+          <p:cNvPr id="14" name="Text 14"/>
           <p:cNvSpPr txBox="1"/>
           <p:nvPr/>
         </p:nvSpPr>
         <p:spPr>
           <a:xfrm>
-            <a:off x="1289190" y="6847792"/>
+            <a:off x="1289190" y="6855065"/>
             <a:ext cx="1415873" cy="152400"/>
           </a:xfrm>
           <a:prstGeom prst="rect">
@@ -1754,7 +1741,7 @@
       </p:sp>
       <p:sp>
         <p:nvSpPr>
-          <p:cNvPr id="16" name="Text 16"/>
+          <p:cNvPr id="15" name="Text 15"/>
           <p:cNvSpPr txBox="1"/>
           <p:nvPr/>
         </p:nvSpPr>
@@ -1808,7 +1795,7 @@
       </p:sp>
       <p:sp>
         <p:nvSpPr>
-          <p:cNvPr id="17" name="Text 17"/>
+          <p:cNvPr id="16" name="Text 16"/>
           <p:cNvSpPr txBox="1"/>
           <p:nvPr/>
         </p:nvSpPr>
@@ -1835,7 +1822,7 @@
               <a:buNone/>
             </a:pPr>
             <a:r>
-              <a:rPr lang="en-US" sz="650" spc="10" dirty="0">
+              <a:rPr lang="en-US" sz="650" spc="11" dirty="0">
                 <a:solidFill>
                   <a:srgbClr val="000000"/>
                 </a:solidFill>
@@ -1843,7 +1830,7 @@
                 <a:ea typeface="Malgun Gothic"/>
                 <a:cs typeface="Arial"/>
               </a:rPr>
-              <a:t>rices do not include GST, may change without notice and are subject to availability. Sulte sizes may vary on final Strata Plan. Concert reserves the right t</a:t>
+              <a:t>Prices do not include GST, may change without notice and are subject to availability. Sulte sizes may vary on final Strata Plan. Concert reserves the right to</a:t>
             </a:r>
             <a:r>
               <a:rPr lang="en-US" sz="650" dirty="0">
@@ -1857,7 +1844,7 @@
               <a:t> </a:t>
             </a:r>
             <a:r>
-              <a:rPr lang="en-US" sz="600" spc="10" dirty="0">
+              <a:rPr lang="en-US" sz="600" spc="11" dirty="0">
                 <a:solidFill>
                   <a:srgbClr val="000000"/>
                 </a:solidFill>
@@ -1865,21 +1852,21 @@
                 <a:ea typeface="Malgun Gothic"/>
                 <a:cs typeface="Arial"/>
               </a:rPr>
-              <a:t>make modifications and changes to floorplans, project design, specifications and features. October 2021. CONCERT REALTY SERVICES LTD. E.&amp;O.E.</a:t>
+              <a:t>nake modifications and changes to floorplans, project design, specifications and features. October 2021. CONCERT REALTY SERVICES LTD. E.8O.!</a:t>
             </a:r>
           </a:p>
         </p:txBody>
       </p:sp>
       <p:sp>
         <p:nvSpPr>
-          <p:cNvPr id="18" name="Text 18"/>
+          <p:cNvPr id="17" name="Text 17"/>
           <p:cNvSpPr txBox="1"/>
           <p:nvPr/>
         </p:nvSpPr>
         <p:spPr>
           <a:xfrm>
             <a:off x="1069357" y="8798979"/>
-            <a:ext cx="2375314" cy="263202"/>
+            <a:ext cx="2370657" cy="248579"/>
           </a:xfrm>
           <a:prstGeom prst="rect">
             <a:avLst/>
@@ -1894,7 +1881,7 @@
           <a:p>
             <a:pPr algn="l">
               <a:lnSpc>
-                <a:spcPts val="1036"/>
+                <a:spcPts val="979"/>
               </a:lnSpc>
               <a:buNone/>
             </a:pPr>
@@ -1928,14 +1915,14 @@
       </p:sp>
       <p:sp>
         <p:nvSpPr>
-          <p:cNvPr id="19" name="Text 19"/>
+          <p:cNvPr id="18" name="Text 18"/>
           <p:cNvSpPr txBox="1"/>
           <p:nvPr/>
         </p:nvSpPr>
         <p:spPr>
           <a:xfrm>
-            <a:off x="1061905" y="9063082"/>
-            <a:ext cx="2920239" cy="121920"/>
+            <a:off x="1065631" y="9066892"/>
+            <a:ext cx="2915581" cy="114300"/>
           </a:xfrm>
           <a:prstGeom prst="rect">
             <a:avLst/>
@@ -1950,11 +1937,11 @@
           <a:p>
             <a:pPr algn="l">
               <a:lnSpc>
-                <a:spcPts val="960"/>
+                <a:spcPts val="900"/>
               </a:lnSpc>
             </a:pPr>
             <a:r>
-              <a:rPr lang="en-US" sz="800" dirty="0">
+              <a:rPr lang="en-US" sz="750" dirty="0">
                 <a:solidFill>
                   <a:srgbClr val="000000"/>
                 </a:solidFill>
@@ -1969,14 +1956,14 @@
       </p:sp>
       <p:sp>
         <p:nvSpPr>
-          <p:cNvPr id="20" name="Text 20"/>
+          <p:cNvPr id="19" name="Text 19"/>
           <p:cNvSpPr txBox="1"/>
           <p:nvPr/>
         </p:nvSpPr>
         <p:spPr>
           <a:xfrm>
-            <a:off x="5827437" y="9056054"/>
-            <a:ext cx="1248204" cy="121920"/>
+            <a:off x="5827437" y="9059864"/>
+            <a:ext cx="1248204" cy="114300"/>
           </a:xfrm>
           <a:prstGeom prst="rect">
             <a:avLst/>
@@ -1991,7 +1978,7 @@
           <a:p>
             <a:pPr algn="l">
               <a:lnSpc>
-                <a:spcPts val="960"/>
+                <a:spcPts val="900"/>
               </a:lnSpc>
             </a:pPr>
             <a:r>

--- a/ios/Verification/office-layout/OfficeSamplePhoto.pptx
+++ b/ios/Verification/office-layout/OfficeSamplePhoto.pptx
@@ -150,8 +150,8 @@
           <p:nvPr/>
         </p:nvGraphicFramePr>
         <p:xfrm>
-          <a:off x="1054453" y="3069066"/>
-          <a:ext cx="5588975" cy="2370748"/>
+          <a:off x="1054453" y="3057212"/>
+          <a:ext cx="5588975" cy="2377199"/>
         </p:xfrm>
         <a:graphic>
           <a:graphicData uri="http://schemas.openxmlformats.org/drawingml/2006/table">
@@ -163,7 +163,7 @@
                 <a:gridCol w="1384203"/>
                 <a:gridCol w="1330176"/>
               </a:tblGrid>
-              <a:tr h="314589">
+              <a:tr h="318970">
                 <a:tc>
                   <a:txBody>
                     <a:bodyPr/>
@@ -305,7 +305,7 @@
                   </a:tcPr>
                 </a:tc>
               </a:tr>
-              <a:tr h="315692">
+              <a:tr h="324837">
                 <a:tc>
                   <a:txBody>
                     <a:bodyPr/>
@@ -447,7 +447,7 @@
                   </a:tcPr>
                 </a:tc>
               </a:tr>
-              <a:tr h="277214">
+              <a:tr h="281847">
                 <a:tc>
                   <a:txBody>
                     <a:bodyPr/>
@@ -589,7 +589,7 @@
                   </a:tcPr>
                 </a:tc>
               </a:tr>
-              <a:tr h="279685">
+              <a:tr h="272629">
                 <a:tc>
                   <a:txBody>
                     <a:bodyPr/>
@@ -731,7 +731,7 @@
                   </a:tcPr>
                 </a:tc>
               </a:tr>
-              <a:tr h="293988">
+              <a:tr h="287770">
                 <a:tc>
                   <a:txBody>
                     <a:bodyPr/>
@@ -873,7 +873,7 @@
                   </a:tcPr>
                 </a:tc>
               </a:tr>
-              <a:tr h="310940">
+              <a:tr h="319225">
                 <a:tc>
                   <a:txBody>
                     <a:bodyPr/>
@@ -1015,7 +1015,7 @@
                   </a:tcPr>
                 </a:tc>
               </a:tr>
-              <a:tr h="311524">
+              <a:tr h="313333">
                 <a:tc>
                   <a:txBody>
                     <a:bodyPr/>
@@ -1157,7 +1157,7 @@
                   </a:tcPr>
                 </a:tc>
               </a:tr>
-              <a:tr h="267116">
+              <a:tr h="258588">
                 <a:tc>
                   <a:txBody>
                     <a:bodyPr/>
@@ -1332,7 +1332,7 @@
               <a:buNone/>
             </a:pPr>
             <a:r>
-              <a:rPr lang="en-US" sz="2174" spc="196" dirty="0">
+              <a:rPr lang="en-US" sz="2140" spc="196" dirty="0">
                 <a:solidFill>
                   <a:srgbClr val="000000"/>
                 </a:solidFill>
@@ -1353,7 +1353,7 @@
         </p:nvSpPr>
         <p:spPr>
           <a:xfrm>
-            <a:off x="1143877" y="1171620"/>
+            <a:off x="1143877" y="1168844"/>
             <a:ext cx="1974771" cy="114300"/>
           </a:xfrm>
           <a:prstGeom prst="rect">
@@ -1395,7 +1395,7 @@
         </p:nvSpPr>
         <p:spPr>
           <a:xfrm>
-            <a:off x="2522025" y="2148658"/>
+            <a:off x="2522025" y="2134036"/>
             <a:ext cx="2836404" cy="220980"/>
           </a:xfrm>
           <a:prstGeom prst="rect">
@@ -1437,7 +1437,7 @@
         </p:nvSpPr>
         <p:spPr>
           <a:xfrm>
-            <a:off x="3441411" y="2475204"/>
+            <a:off x="3441411" y="2468083"/>
             <a:ext cx="982728" cy="152400"/>
           </a:xfrm>
           <a:prstGeom prst="rect">
@@ -1532,7 +1532,7 @@
         </p:nvSpPr>
         <p:spPr>
           <a:xfrm>
-            <a:off x="1292916" y="6178244"/>
+            <a:off x="1292916" y="6181997"/>
             <a:ext cx="6613619" cy="160020"/>
           </a:xfrm>
           <a:prstGeom prst="rect">
@@ -1575,6 +1575,48 @@
         </p:nvSpPr>
         <p:spPr>
           <a:xfrm>
+            <a:off x="1292916" y="6372952"/>
+            <a:ext cx="498350" cy="152400"/>
+          </a:xfrm>
+          <a:prstGeom prst="rect">
+            <a:avLst/>
+          </a:prstGeom>
+          <a:noFill/>
+        </p:spPr>
+        <p:txBody>
+          <a:bodyPr wrap="none" lIns="0" tIns="0" rIns="0" bIns="0" anchor="t">
+            <a:noAutofit/>
+          </a:bodyPr>
+          <a:lstStyle/>
+          <a:p>
+            <a:pPr algn="l">
+              <a:lnSpc>
+                <a:spcPts val="1200"/>
+              </a:lnSpc>
+              <a:buNone/>
+            </a:pPr>
+            <a:r>
+              <a:rPr lang="en-US" sz="1000" dirty="0">
+                <a:solidFill>
+                  <a:srgbClr val="000000"/>
+                </a:solidFill>
+                <a:latin typeface="Arial"/>
+                <a:ea typeface="Malgun Gothic"/>
+                <a:cs typeface="Arial"/>
+              </a:rPr>
+              <a:t>pe</a:t>
+            </a:r>
+          </a:p>
+        </p:txBody>
+      </p:sp>
+      <p:sp>
+        <p:nvSpPr>
+          <p:cNvPr id="12" name="Text 12"/>
+          <p:cNvSpPr txBox="1"/>
+          <p:nvPr/>
+        </p:nvSpPr>
+        <p:spPr>
+          <a:xfrm>
             <a:off x="1292916" y="6357585"/>
             <a:ext cx="4755285" cy="152400"/>
           </a:xfrm>
@@ -1612,14 +1654,14 @@
       </p:sp>
       <p:sp>
         <p:nvSpPr>
-          <p:cNvPr id="12" name="Text 12"/>
+          <p:cNvPr id="13" name="Text 13"/>
           <p:cNvSpPr txBox="1"/>
           <p:nvPr/>
         </p:nvSpPr>
         <p:spPr>
           <a:xfrm>
-            <a:off x="1241831" y="6529687"/>
-            <a:ext cx="1447128" cy="144780"/>
+            <a:off x="1292916" y="6529687"/>
+            <a:ext cx="1383271" cy="144780"/>
           </a:xfrm>
           <a:prstGeom prst="rect">
             <a:avLst/>
@@ -1632,7 +1674,7 @@
           </a:bodyPr>
           <a:lstStyle/>
           <a:p>
-            <a:pPr algn="l" marL="267192" indent="-267192">
+            <a:pPr algn="l" marL="216107" indent="-216107">
               <a:lnSpc>
                 <a:spcPts val="1140"/>
               </a:lnSpc>
@@ -1655,7 +1697,7 @@
       </p:sp>
       <p:sp>
         <p:nvSpPr>
-          <p:cNvPr id="13" name="Text 13"/>
+          <p:cNvPr id="14" name="Text 14"/>
           <p:cNvSpPr txBox="1"/>
           <p:nvPr/>
         </p:nvSpPr>
@@ -1698,7 +1740,7 @@
       </p:sp>
       <p:sp>
         <p:nvSpPr>
-          <p:cNvPr id="14" name="Text 14"/>
+          <p:cNvPr id="15" name="Text 15"/>
           <p:cNvSpPr txBox="1"/>
           <p:nvPr/>
         </p:nvSpPr>
@@ -1741,7 +1783,7 @@
       </p:sp>
       <p:sp>
         <p:nvSpPr>
-          <p:cNvPr id="15" name="Text 15"/>
+          <p:cNvPr id="16" name="Text 16"/>
           <p:cNvSpPr txBox="1"/>
           <p:nvPr/>
         </p:nvSpPr>
@@ -1769,7 +1811,7 @@
               <a:buChar char="•"/>
             </a:pPr>
             <a:r>
-              <a:rPr lang="en-US" sz="1050" spc="22" dirty="0">
+              <a:rPr lang="en-US" sz="1050" spc="19" dirty="0">
                 <a:solidFill>
                   <a:srgbClr val="000000"/>
                 </a:solidFill>
@@ -1780,7 +1822,7 @@
               <a:t>Certified cheques or bank drafts made out to</a:t>
             </a:r>
             <a:r>
-              <a:rPr lang="en-US" sz="1050" b="1" spc="22" dirty="0">
+              <a:rPr lang="en-US" sz="1050" b="1" spc="19" dirty="0">
                 <a:solidFill>
                   <a:srgbClr val="000000"/>
                 </a:solidFill>
@@ -1795,14 +1837,14 @@
       </p:sp>
       <p:sp>
         <p:nvSpPr>
-          <p:cNvPr id="16" name="Text 16"/>
+          <p:cNvPr id="17" name="Text 17"/>
           <p:cNvSpPr txBox="1"/>
           <p:nvPr/>
         </p:nvSpPr>
         <p:spPr>
           <a:xfrm>
-            <a:off x="1080535" y="7909155"/>
-            <a:ext cx="5718266" cy="194818"/>
+            <a:off x="1065631" y="7920064"/>
+            <a:ext cx="5768157" cy="194818"/>
           </a:xfrm>
           <a:prstGeom prst="rect">
             <a:avLst/>
@@ -1822,7 +1864,7 @@
               <a:buNone/>
             </a:pPr>
             <a:r>
-              <a:rPr lang="en-US" sz="650" spc="11" dirty="0">
+              <a:rPr lang="en-US" sz="650" spc="9" dirty="0">
                 <a:solidFill>
                   <a:srgbClr val="000000"/>
                 </a:solidFill>
@@ -1830,7 +1872,7 @@
                 <a:ea typeface="Malgun Gothic"/>
                 <a:cs typeface="Arial"/>
               </a:rPr>
-              <a:t>Prices do not include GST, may change without notice and are subject to availability. Sulte sizes may vary on final Strata Plan. Concert reserves the right to</a:t>
+              <a:t>Prices do not include GST, may change without notice and are subject to availability. Suite sizes may vary on final Strata Plan. Concert reserves the right to</a:t>
             </a:r>
             <a:r>
               <a:rPr lang="en-US" sz="650" dirty="0">
@@ -1844,7 +1886,7 @@
               <a:t> </a:t>
             </a:r>
             <a:r>
-              <a:rPr lang="en-US" sz="600" spc="11" dirty="0">
+              <a:rPr lang="en-US" sz="600" spc="9" dirty="0">
                 <a:solidFill>
                   <a:srgbClr val="000000"/>
                 </a:solidFill>
@@ -1852,21 +1894,21 @@
                 <a:ea typeface="Malgun Gothic"/>
                 <a:cs typeface="Arial"/>
               </a:rPr>
-              <a:t>nake modifications and changes to floorplans, project design, specifications and features. October 2021. CONCERT REALTY SERVICES LTD. E.8O.!</a:t>
+              <a:t>make modifications and changes to floorplans, project design, specifications and features. October 2021. CONCERT REALTY SERVICES LTD. E.&amp;O.E.</a:t>
             </a:r>
           </a:p>
         </p:txBody>
       </p:sp>
       <p:sp>
         <p:nvSpPr>
-          <p:cNvPr id="17" name="Text 17"/>
+          <p:cNvPr id="18" name="Text 18"/>
           <p:cNvSpPr txBox="1"/>
           <p:nvPr/>
         </p:nvSpPr>
         <p:spPr>
           <a:xfrm>
             <a:off x="1069357" y="8798979"/>
-            <a:ext cx="2370657" cy="248579"/>
+            <a:ext cx="2370657" cy="233957"/>
           </a:xfrm>
           <a:prstGeom prst="rect">
             <a:avLst/>
@@ -1881,7 +1923,7 @@
           <a:p>
             <a:pPr algn="l">
               <a:lnSpc>
-                <a:spcPts val="979"/>
+                <a:spcPts val="921"/>
               </a:lnSpc>
               <a:buNone/>
             </a:pPr>
@@ -1908,14 +1950,14 @@
                 <a:ea typeface="Malgun Gothic"/>
                 <a:cs typeface="Arial"/>
               </a:rPr>
-              <a:t>101 - 511 Clarke Road, Coquitlam, BC V3J 0J1</a:t>
+              <a:t>101 - 511 Clarke Road, Coquitlam, BC V3J 0/1</a:t>
             </a:r>
           </a:p>
         </p:txBody>
       </p:sp>
       <p:sp>
         <p:nvSpPr>
-          <p:cNvPr id="18" name="Text 18"/>
+          <p:cNvPr id="19" name="Text 19"/>
           <p:cNvSpPr txBox="1"/>
           <p:nvPr/>
         </p:nvSpPr>
@@ -1956,13 +1998,13 @@
       </p:sp>
       <p:sp>
         <p:nvSpPr>
-          <p:cNvPr id="19" name="Text 19"/>
+          <p:cNvPr id="20" name="Text 20"/>
           <p:cNvSpPr txBox="1"/>
           <p:nvPr/>
         </p:nvSpPr>
         <p:spPr>
           <a:xfrm>
-            <a:off x="5827437" y="9059864"/>
+            <a:off x="5827437" y="9052553"/>
             <a:ext cx="1248204" cy="114300"/>
           </a:xfrm>
           <a:prstGeom prst="rect">
@@ -1990,7 +2032,7 @@
                 <a:ea typeface="Malgun Gothic"/>
                 <a:cs typeface="Arial"/>
               </a:rPr>
-              <a:t>CONCERT®</a:t>
+              <a:t>CONCERT'</a:t>
             </a:r>
           </a:p>
         </p:txBody>

--- a/ios/Verification/office-layout/OfficeSamplePhoto.pptx
+++ b/ios/Verification/office-layout/OfficeSamplePhoto.pptx
@@ -134,7 +134,7 @@
         <p:spPr>
           <a:xfrm>
             <a:off x="1028371" y="462022"/>
-            <a:ext cx="1311546" cy="59616"/>
+            <a:ext cx="1311546" cy="298079"/>
           </a:xfrm>
           <a:prstGeom prst="rect">
             <a:avLst/>
